--- a/aip-lab/vidhi/ConfAI_Vidhi_Firewall_7Slides_v3.pptx
+++ b/aip-lab/vidhi/ConfAI_Vidhi_Firewall_7Slides_v3.pptx
@@ -3778,7 +3778,7 @@
               </a:defRPr>
             </a:pPr>
             <a:r>
-              <a:t>Live question for the room: “What was urban female LFPR in PLFS 2025?” — it refuses to guess and shows exactly why (slide 5).</a:t>
+              <a:t>Live question for the room: “What was female LFPR in Bihar in PLFS 2025?” — it refuses to guess and shows exactly why (slide 5).</a:t>
             </a:r>
           </a:p>
         </p:txBody>
@@ -5595,7 +5595,7 @@
               </a:defRPr>
             </a:pPr>
             <a:r>
-              <a:t>Q: What was all-India LFPR for age 15+ in usual status in PLFS 2025?  ·  hash 64687a5b</a:t>
+              <a:t>Q: What was all-India LFPR for age 15+ in usual status in PLFS 2025?  ·  hash efb76eb2</a:t>
             </a:r>
           </a:p>
         </p:txBody>
@@ -5655,8 +5655,8 @@
         </p:blipFill>
         <p:spPr>
           <a:xfrm>
-            <a:off x="7409447" y="2148840"/>
-            <a:ext cx="2966185" cy="3931920"/>
+            <a:off x="6306344" y="2148840"/>
+            <a:ext cx="5172391" cy="3931920"/>
           </a:xfrm>
           <a:prstGeom prst="rect">
             <a:avLst/>
@@ -5954,7 +5954,7 @@
               </a:defRPr>
             </a:pPr>
             <a:r>
-              <a:t>WARN_NO_DATA — urban female LFPR (SOURCED 27.7%)</a:t>
+              <a:t>WARN_NO_DATA — female LFPR in Bihar (state splits, coverage note)</a:t>
             </a:r>
           </a:p>
         </p:txBody>
@@ -5975,8 +5975,8 @@
         </p:blipFill>
         <p:spPr>
           <a:xfrm>
-            <a:off x="800609" y="2148840"/>
-            <a:ext cx="5028180" cy="3931920"/>
+            <a:off x="1097354" y="2148840"/>
+            <a:ext cx="4434690" cy="3931920"/>
           </a:xfrm>
           <a:prstGeom prst="rect">
             <a:avLst/>
@@ -6263,7 +6263,7 @@
               </a:defRPr>
             </a:pPr>
             <a:r>
-              <a:t>173 verified rows · 100 golden · 19 danger · 28 red-team · offline unit tests</a:t>
+              <a:t>1708 verified rows · 100 golden · 19 danger · 28 red-team · offline unit tests</a:t>
             </a:r>
           </a:p>
         </p:txBody>
@@ -6458,7 +6458,7 @@
               </a:defRPr>
             </a:pPr>
             <a:r>
-              <a:t>Reason codes 100/100 · figures 59/59 [0.939–1.000]</a:t>
+              <a:t>Reason codes 100/100 · figures 60/60 [0.940–1.000]</a:t>
             </a:r>
           </a:p>
           <a:p>
@@ -6538,7 +6538,7 @@
               </a:defRPr>
             </a:pPr>
             <a:r>
-              <a:t>Unit tests: 108 passed, offline, no key</a:t>
+              <a:t>Unit tests: 110 passed, offline, no key</a:t>
             </a:r>
           </a:p>
           <a:p>
@@ -6816,7 +6816,7 @@
               </a:defRPr>
             </a:pPr>
             <a:r>
-              <a:t>From 173 rows to national coverage without touching the firewall</a:t>
+              <a:t>From 1708 verified rows to national coverage without touching the firewall</a:t>
             </a:r>
           </a:p>
         </p:txBody>
@@ -7047,7 +7047,7 @@
               </a:defRPr>
             </a:pPr>
             <a:r>
-              <a:t>2. One parser per table family (Statement 7 done: 37/37 pairs, 0 mismatches); TUS and MIS tables next.</a:t>
+              <a:t>2. One parser per table family: PLFS Highlights battery (both annual reports), TUS tables/battery and HCES Statement 10 done; MIS tables next.</a:t>
             </a:r>
           </a:p>
           <a:p>
@@ -7179,7 +7179,7 @@
               </a:defRPr>
             </a:pPr>
             <a:r>
-              <a:t>pytest tests/ -q  →  108 passed, offline, no key</a:t>
+              <a:t>pytest tests/ -q  →  110 passed, offline, no key</a:t>
             </a:r>
           </a:p>
           <a:p>

--- a/aip-lab/vidhi/ConfAI_Vidhi_Firewall_7Slides_v3.pptx
+++ b/aip-lab/vidhi/ConfAI_Vidhi_Firewall_7Slides_v3.pptx
@@ -5655,8 +5655,8 @@
         </p:blipFill>
         <p:spPr>
           <a:xfrm>
-            <a:off x="6306344" y="2148840"/>
-            <a:ext cx="5172391" cy="3931920"/>
+            <a:off x="7391340" y="2148840"/>
+            <a:ext cx="3002398" cy="3931920"/>
           </a:xfrm>
           <a:prstGeom prst="rect">
             <a:avLst/>
@@ -5703,6 +5703,45 @@
             </a:pPr>
             <a:r>
               <a:t>mpce for bihar: rural/urban × with/without imputation, each with its row_id</a:t>
+            </a:r>
+          </a:p>
+        </p:txBody>
+      </p:sp>
+      <p:sp>
+        <p:nvSpPr>
+          <p:cNvPr id="13" name="TextBox 12"/>
+          <p:cNvSpPr txBox="1"/>
+          <p:nvPr/>
+        </p:nvSpPr>
+        <p:spPr>
+          <a:xfrm>
+            <a:off x="640080" y="5760720"/>
+            <a:ext cx="10881360" cy="457200"/>
+          </a:xfrm>
+          <a:prstGeom prst="rect">
+            <a:avLst/>
+          </a:prstGeom>
+          <a:noFill/>
+        </p:spPr>
+        <p:txBody>
+          <a:bodyPr wrap="square">
+            <a:spAutoFit/>
+          </a:bodyPr>
+          <a:lstStyle/>
+          <a:p>
+            <a:pPr>
+              <a:spcAft>
+                <a:spcPts val="300"/>
+              </a:spcAft>
+              <a:defRPr sz="1050" b="1">
+                <a:solidFill>
+                  <a:srgbClr val="22302B"/>
+                </a:solidFill>
+                <a:latin typeface="Calibri"/>
+              </a:defRPr>
+            </a:pPr>
+            <a:r>
+              <a:t>Generalised, not hard-coded: any state, any spelling — “mp”, “up”, “m.p.”, “orissa”, “maharastra”; several states at once; an open slice returns every published cell, never one narrowed figure.</a:t>
             </a:r>
           </a:p>
         </p:txBody>

--- a/aip-lab/vidhi/ConfAI_Vidhi_Firewall_7Slides_v3.pptx
+++ b/aip-lab/vidhi/ConfAI_Vidhi_Firewall_7Slides_v3.pptx
@@ -3912,7 +3912,7 @@
               </a:defRPr>
             </a:pPr>
             <a:r>
-              <a:t>Session statsdoc.ai.mospi.gov.in/c/2402 — anecdotal observations, not a measured baseline (see evaluation/statsdoc_audit/PROTOCOL.md)</a:t>
+              <a:t>Archived transcripts, chats 2472-2480 (evaluation/statsdoc_audit/sessions/2026-10-20/) — one session, one prompt set; an observation, not a benchmark</a:t>
             </a:r>
           </a:p>
         </p:txBody>

--- a/aip-lab/vidhi/ConfAI_Vidhi_Firewall_7Slides_v3.pptx
+++ b/aip-lab/vidhi/ConfAI_Vidhi_Firewall_7Slides_v3.pptx
@@ -5595,7 +5595,7 @@
               </a:defRPr>
             </a:pPr>
             <a:r>
-              <a:t>Q: What was all-India LFPR for age 15+ in usual status in PLFS 2025?  ·  hash efb76eb2</a:t>
+              <a:t>Q: What was all-India LFPR for age 15+ in usual status in PLFS 2025?  ·  hash ea18f4af</a:t>
             </a:r>
           </a:p>
         </p:txBody>
